--- a/4.regression_classification/regression_classification.pptx
+++ b/4.regression_classification/regression_classification.pptx
@@ -135,6 +135,11 @@
       </a:defRPr>
     </a:lvl9pPr>
   </p:defaultTextStyle>
+  <p:extLst>
+    <p:ext uri="{EFAFB233-063F-42B5-8137-9DF3F51BA10A}">
+      <p15:sldGuideLst xmlns:p15="http://schemas.microsoft.com/office/powerpoint/2012/main"/>
+    </p:ext>
+  </p:extLst>
 </p:presentation>
 </file>
 
@@ -4468,7 +4473,7 @@
           <a:p>
             <a:fld id="{9F4A4D9A-970E-0944-A3BE-032DB7D51C33}" type="datetimeFigureOut">
               <a:rPr lang="en-US" smtClean="0"/>
-              <a:t>9/23/25</a:t>
+              <a:t>9/25/25</a:t>
             </a:fld>
             <a:endParaRPr lang="en-US"/>
           </a:p>
@@ -4914,6 +4919,120 @@
           <a:p>
             <a:r>
               <a:rPr lang="en-AU" dirty="0"/>
+              <a:t>“So how do we fix the overfitting problem? The key is not to keep every PC, but to pick the number that balances bias and variance.”</a:t>
+            </a:r>
+          </a:p>
+          <a:p>
+            <a:r>
+              <a:rPr lang="en-AU" dirty="0"/>
+              <a:t>“We can try a range of PC counts, say 3 to 15, and evaluate on the test set or using cross-validation.”</a:t>
+            </a:r>
+          </a:p>
+          <a:p>
+            <a:r>
+              <a:rPr lang="en-AU" dirty="0"/>
+              <a:t>“This gives us a curve of Test RMSE versus number of PCs. Somewhere in the middle, the RMSE is lowest, that’s our sweet spot.”</a:t>
+            </a:r>
+          </a:p>
+          <a:p>
+            <a:r>
+              <a:rPr lang="en-AU" dirty="0"/>
+              <a:t>“Notice that while training error always goes down as we add more PCs, test error tells the truth. That’s why evaluation is essential.”</a:t>
+            </a:r>
+          </a:p>
+          <a:p>
+            <a:r>
+              <a:rPr lang="en-AU" dirty="0"/>
+              <a:t>“The rule of thumb: keep models as simple as you can, as long as they still generalize.”</a:t>
+            </a:r>
+          </a:p>
+          <a:p>
+            <a:endParaRPr lang="en-US" dirty="0"/>
+          </a:p>
+        </p:txBody>
+      </p:sp>
+      <p:sp>
+        <p:nvSpPr>
+          <p:cNvPr id="4" name="Slide Number Placeholder 3"/>
+          <p:cNvSpPr>
+            <a:spLocks noGrp="1"/>
+          </p:cNvSpPr>
+          <p:nvPr>
+            <p:ph type="sldNum" sz="quarter" idx="5"/>
+          </p:nvPr>
+        </p:nvSpPr>
+        <p:spPr/>
+        <p:txBody>
+          <a:bodyPr/>
+          <a:lstStyle/>
+          <a:p>
+            <a:fld id="{11C670DA-D77F-1249-B207-3EF3B8E0C85F}" type="slidenum">
+              <a:rPr lang="en-US" smtClean="0"/>
+              <a:t>12</a:t>
+            </a:fld>
+            <a:endParaRPr lang="en-US"/>
+          </a:p>
+        </p:txBody>
+      </p:sp>
+    </p:spTree>
+    <p:extLst>
+      <p:ext uri="{BB962C8B-B14F-4D97-AF65-F5344CB8AC3E}">
+        <p14:creationId xmlns:p14="http://schemas.microsoft.com/office/powerpoint/2010/main" val="1823442889"/>
+      </p:ext>
+    </p:extLst>
+  </p:cSld>
+  <p:clrMapOvr>
+    <a:masterClrMapping/>
+  </p:clrMapOvr>
+</p:notes>
+</file>
+
+<file path=ppt/notesSlides/notesSlide11.xml><?xml version="1.0" encoding="utf-8"?>
+<p:notes xmlns:a="http://schemas.openxmlformats.org/drawingml/2006/main" xmlns:r="http://schemas.openxmlformats.org/officeDocument/2006/relationships" xmlns:p="http://schemas.openxmlformats.org/presentationml/2006/main">
+  <p:cSld>
+    <p:spTree>
+      <p:nvGrpSpPr>
+        <p:cNvPr id="1" name=""/>
+        <p:cNvGrpSpPr/>
+        <p:nvPr/>
+      </p:nvGrpSpPr>
+      <p:grpSpPr>
+        <a:xfrm>
+          <a:off x="0" y="0"/>
+          <a:ext cx="0" cy="0"/>
+          <a:chOff x="0" y="0"/>
+          <a:chExt cx="0" cy="0"/>
+        </a:xfrm>
+      </p:grpSpPr>
+      <p:sp>
+        <p:nvSpPr>
+          <p:cNvPr id="2" name="Slide Image Placeholder 1"/>
+          <p:cNvSpPr>
+            <a:spLocks noGrp="1" noRot="1" noChangeAspect="1"/>
+          </p:cNvSpPr>
+          <p:nvPr>
+            <p:ph type="sldImg"/>
+          </p:nvPr>
+        </p:nvSpPr>
+        <p:spPr/>
+      </p:sp>
+      <p:sp>
+        <p:nvSpPr>
+          <p:cNvPr id="3" name="Notes Placeholder 2"/>
+          <p:cNvSpPr>
+            <a:spLocks noGrp="1"/>
+          </p:cNvSpPr>
+          <p:nvPr>
+            <p:ph type="body" idx="1"/>
+          </p:nvPr>
+        </p:nvSpPr>
+        <p:spPr/>
+        <p:txBody>
+          <a:bodyPr/>
+          <a:lstStyle/>
+          <a:p>
+            <a:r>
+              <a:rPr lang="en-AU" dirty="0"/>
               <a:t>“So far, we’ve focused on regression, predicting BMI as a number. But what if our outcome is categorical, like COVID vs No COVID?”</a:t>
             </a:r>
           </a:p>
@@ -5006,7 +5125,7 @@
 </p:notes>
 </file>
 
-<file path=ppt/notesSlides/notesSlide11.xml><?xml version="1.0" encoding="utf-8"?>
+<file path=ppt/notesSlides/notesSlide12.xml><?xml version="1.0" encoding="utf-8"?>
 <p:notes xmlns:a="http://schemas.openxmlformats.org/drawingml/2006/main" xmlns:r="http://schemas.openxmlformats.org/officeDocument/2006/relationships" xmlns:p="http://schemas.openxmlformats.org/presentationml/2006/main">
   <p:cSld>
     <p:spTree>
@@ -5168,7 +5287,7 @@
 </p:notes>
 </file>
 
-<file path=ppt/notesSlides/notesSlide12.xml><?xml version="1.0" encoding="utf-8"?>
+<file path=ppt/notesSlides/notesSlide13.xml><?xml version="1.0" encoding="utf-8"?>
 <p:notes xmlns:a="http://schemas.openxmlformats.org/drawingml/2006/main" xmlns:r="http://schemas.openxmlformats.org/officeDocument/2006/relationships" xmlns:p="http://schemas.openxmlformats.org/presentationml/2006/main">
   <p:cSld>
     <p:spTree>
@@ -5252,7 +5371,7 @@
 </p:notes>
 </file>
 
-<file path=ppt/notesSlides/notesSlide13.xml><?xml version="1.0" encoding="utf-8"?>
+<file path=ppt/notesSlides/notesSlide14.xml><?xml version="1.0" encoding="utf-8"?>
 <p:notes xmlns:a="http://schemas.openxmlformats.org/drawingml/2006/main" xmlns:r="http://schemas.openxmlformats.org/officeDocument/2006/relationships" xmlns:p="http://schemas.openxmlformats.org/presentationml/2006/main">
   <p:cSld>
     <p:spTree>
@@ -5360,7 +5479,7 @@
 </p:notes>
 </file>
 
-<file path=ppt/notesSlides/notesSlide14.xml><?xml version="1.0" encoding="utf-8"?>
+<file path=ppt/notesSlides/notesSlide15.xml><?xml version="1.0" encoding="utf-8"?>
 <p:notes xmlns:a="http://schemas.openxmlformats.org/drawingml/2006/main" xmlns:r="http://schemas.openxmlformats.org/officeDocument/2006/relationships" xmlns:p="http://schemas.openxmlformats.org/presentationml/2006/main">
   <p:cSld>
     <p:spTree>
@@ -5468,7 +5587,7 @@
 </p:notes>
 </file>
 
-<file path=ppt/notesSlides/notesSlide15.xml><?xml version="1.0" encoding="utf-8"?>
+<file path=ppt/notesSlides/notesSlide16.xml><?xml version="1.0" encoding="utf-8"?>
 <p:notes xmlns:a="http://schemas.openxmlformats.org/drawingml/2006/main" xmlns:r="http://schemas.openxmlformats.org/officeDocument/2006/relationships" xmlns:p="http://schemas.openxmlformats.org/presentationml/2006/main">
   <p:cSld>
     <p:spTree>
@@ -5552,7 +5671,7 @@
 </p:notes>
 </file>
 
-<file path=ppt/notesSlides/notesSlide16.xml><?xml version="1.0" encoding="utf-8"?>
+<file path=ppt/notesSlides/notesSlide17.xml><?xml version="1.0" encoding="utf-8"?>
 <p:notes xmlns:a="http://schemas.openxmlformats.org/drawingml/2006/main" xmlns:r="http://schemas.openxmlformats.org/officeDocument/2006/relationships" xmlns:p="http://schemas.openxmlformats.org/presentationml/2006/main">
   <p:cSld>
     <p:spTree>
@@ -5636,7 +5755,7 @@
 </p:notes>
 </file>
 
-<file path=ppt/notesSlides/notesSlide17.xml><?xml version="1.0" encoding="utf-8"?>
+<file path=ppt/notesSlides/notesSlide18.xml><?xml version="1.0" encoding="utf-8"?>
 <p:notes xmlns:a="http://schemas.openxmlformats.org/drawingml/2006/main" xmlns:r="http://schemas.openxmlformats.org/officeDocument/2006/relationships" xmlns:p="http://schemas.openxmlformats.org/presentationml/2006/main">
   <p:cSld>
     <p:spTree>
@@ -5720,7 +5839,7 @@
 </p:notes>
 </file>
 
-<file path=ppt/notesSlides/notesSlide18.xml><?xml version="1.0" encoding="utf-8"?>
+<file path=ppt/notesSlides/notesSlide19.xml><?xml version="1.0" encoding="utf-8"?>
 <p:notes xmlns:a="http://schemas.openxmlformats.org/drawingml/2006/main" xmlns:r="http://schemas.openxmlformats.org/officeDocument/2006/relationships" xmlns:p="http://schemas.openxmlformats.org/presentationml/2006/main">
   <p:cSld>
     <p:spTree>
@@ -5828,116 +5947,6 @@
 </p:notes>
 </file>
 
-<file path=ppt/notesSlides/notesSlide19.xml><?xml version="1.0" encoding="utf-8"?>
-<p:notes xmlns:a="http://schemas.openxmlformats.org/drawingml/2006/main" xmlns:r="http://schemas.openxmlformats.org/officeDocument/2006/relationships" xmlns:p="http://schemas.openxmlformats.org/presentationml/2006/main">
-  <p:cSld>
-    <p:spTree>
-      <p:nvGrpSpPr>
-        <p:cNvPr id="1" name=""/>
-        <p:cNvGrpSpPr/>
-        <p:nvPr/>
-      </p:nvGrpSpPr>
-      <p:grpSpPr>
-        <a:xfrm>
-          <a:off x="0" y="0"/>
-          <a:ext cx="0" cy="0"/>
-          <a:chOff x="0" y="0"/>
-          <a:chExt cx="0" cy="0"/>
-        </a:xfrm>
-      </p:grpSpPr>
-      <p:sp>
-        <p:nvSpPr>
-          <p:cNvPr id="2" name="Slide Image Placeholder 1"/>
-          <p:cNvSpPr>
-            <a:spLocks noGrp="1" noRot="1" noChangeAspect="1"/>
-          </p:cNvSpPr>
-          <p:nvPr>
-            <p:ph type="sldImg"/>
-          </p:nvPr>
-        </p:nvSpPr>
-        <p:spPr/>
-      </p:sp>
-      <p:sp>
-        <p:nvSpPr>
-          <p:cNvPr id="3" name="Notes Placeholder 2"/>
-          <p:cNvSpPr>
-            <a:spLocks noGrp="1"/>
-          </p:cNvSpPr>
-          <p:nvPr>
-            <p:ph type="body" idx="1"/>
-          </p:nvPr>
-        </p:nvSpPr>
-        <p:spPr/>
-        <p:txBody>
-          <a:bodyPr/>
-          <a:lstStyle/>
-          <a:p>
-            <a:r>
-              <a:rPr lang="en-AU" dirty="0"/>
-              <a:t>“Logistic regression takes the idea of a straight line and then squashes it into probabilities between 0 and 1.”</a:t>
-            </a:r>
-          </a:p>
-          <a:p>
-            <a:r>
-              <a:rPr lang="en-AU" dirty="0"/>
-              <a:t>“It’s popular in biology because coefficients are interpretable — they tell us which PCs or features increase or decrease the odds of COVID.”</a:t>
-            </a:r>
-          </a:p>
-          <a:p>
-            <a:r>
-              <a:rPr lang="en-AU" dirty="0"/>
-              <a:t>“But it can only learn </a:t>
-            </a:r>
-            <a:r>
-              <a:rPr lang="en-AU" b="1" dirty="0"/>
-              <a:t>linear boundaries</a:t>
-            </a:r>
-            <a:r>
-              <a:rPr lang="en-AU" dirty="0"/>
-              <a:t> unless we engineer features.”</a:t>
-            </a:r>
-          </a:p>
-          <a:p>
-            <a:endParaRPr lang="en-US" dirty="0"/>
-          </a:p>
-        </p:txBody>
-      </p:sp>
-      <p:sp>
-        <p:nvSpPr>
-          <p:cNvPr id="4" name="Slide Number Placeholder 3"/>
-          <p:cNvSpPr>
-            <a:spLocks noGrp="1"/>
-          </p:cNvSpPr>
-          <p:nvPr>
-            <p:ph type="sldNum" sz="quarter" idx="5"/>
-          </p:nvPr>
-        </p:nvSpPr>
-        <p:spPr/>
-        <p:txBody>
-          <a:bodyPr/>
-          <a:lstStyle/>
-          <a:p>
-            <a:fld id="{11C670DA-D77F-1249-B207-3EF3B8E0C85F}" type="slidenum">
-              <a:rPr lang="en-US" smtClean="0"/>
-              <a:t>26</a:t>
-            </a:fld>
-            <a:endParaRPr lang="en-US"/>
-          </a:p>
-        </p:txBody>
-      </p:sp>
-    </p:spTree>
-    <p:extLst>
-      <p:ext uri="{BB962C8B-B14F-4D97-AF65-F5344CB8AC3E}">
-        <p14:creationId xmlns:p14="http://schemas.microsoft.com/office/powerpoint/2010/main" val="3787730762"/>
-      </p:ext>
-    </p:extLst>
-  </p:cSld>
-  <p:clrMapOvr>
-    <a:masterClrMapping/>
-  </p:clrMapOvr>
-</p:notes>
-</file>
-
 <file path=ppt/notesSlides/notesSlide2.xml><?xml version="1.0" encoding="utf-8"?>
 <p:notes xmlns:a="http://schemas.openxmlformats.org/drawingml/2006/main" xmlns:r="http://schemas.openxmlformats.org/officeDocument/2006/relationships" xmlns:p="http://schemas.openxmlformats.org/presentationml/2006/main">
   <p:cSld>
@@ -6221,6 +6230,116 @@
           <a:p>
             <a:r>
               <a:rPr lang="en-AU" dirty="0"/>
+              <a:t>“Logistic regression takes the idea of a straight line and then squashes it into probabilities between 0 and 1.”</a:t>
+            </a:r>
+          </a:p>
+          <a:p>
+            <a:r>
+              <a:rPr lang="en-AU" dirty="0"/>
+              <a:t>“It’s popular in biology because coefficients are interpretable — they tell us which PCs or features increase or decrease the odds of COVID.”</a:t>
+            </a:r>
+          </a:p>
+          <a:p>
+            <a:r>
+              <a:rPr lang="en-AU" dirty="0"/>
+              <a:t>“But it can only learn </a:t>
+            </a:r>
+            <a:r>
+              <a:rPr lang="en-AU" b="1" dirty="0"/>
+              <a:t>linear boundaries</a:t>
+            </a:r>
+            <a:r>
+              <a:rPr lang="en-AU" dirty="0"/>
+              <a:t> unless we engineer features.”</a:t>
+            </a:r>
+          </a:p>
+          <a:p>
+            <a:endParaRPr lang="en-US" dirty="0"/>
+          </a:p>
+        </p:txBody>
+      </p:sp>
+      <p:sp>
+        <p:nvSpPr>
+          <p:cNvPr id="4" name="Slide Number Placeholder 3"/>
+          <p:cNvSpPr>
+            <a:spLocks noGrp="1"/>
+          </p:cNvSpPr>
+          <p:nvPr>
+            <p:ph type="sldNum" sz="quarter" idx="5"/>
+          </p:nvPr>
+        </p:nvSpPr>
+        <p:spPr/>
+        <p:txBody>
+          <a:bodyPr/>
+          <a:lstStyle/>
+          <a:p>
+            <a:fld id="{11C670DA-D77F-1249-B207-3EF3B8E0C85F}" type="slidenum">
+              <a:rPr lang="en-US" smtClean="0"/>
+              <a:t>26</a:t>
+            </a:fld>
+            <a:endParaRPr lang="en-US"/>
+          </a:p>
+        </p:txBody>
+      </p:sp>
+    </p:spTree>
+    <p:extLst>
+      <p:ext uri="{BB962C8B-B14F-4D97-AF65-F5344CB8AC3E}">
+        <p14:creationId xmlns:p14="http://schemas.microsoft.com/office/powerpoint/2010/main" val="3787730762"/>
+      </p:ext>
+    </p:extLst>
+  </p:cSld>
+  <p:clrMapOvr>
+    <a:masterClrMapping/>
+  </p:clrMapOvr>
+</p:notes>
+</file>
+
+<file path=ppt/notesSlides/notesSlide21.xml><?xml version="1.0" encoding="utf-8"?>
+<p:notes xmlns:a="http://schemas.openxmlformats.org/drawingml/2006/main" xmlns:r="http://schemas.openxmlformats.org/officeDocument/2006/relationships" xmlns:p="http://schemas.openxmlformats.org/presentationml/2006/main">
+  <p:cSld>
+    <p:spTree>
+      <p:nvGrpSpPr>
+        <p:cNvPr id="1" name=""/>
+        <p:cNvGrpSpPr/>
+        <p:nvPr/>
+      </p:nvGrpSpPr>
+      <p:grpSpPr>
+        <a:xfrm>
+          <a:off x="0" y="0"/>
+          <a:ext cx="0" cy="0"/>
+          <a:chOff x="0" y="0"/>
+          <a:chExt cx="0" cy="0"/>
+        </a:xfrm>
+      </p:grpSpPr>
+      <p:sp>
+        <p:nvSpPr>
+          <p:cNvPr id="2" name="Slide Image Placeholder 1"/>
+          <p:cNvSpPr>
+            <a:spLocks noGrp="1" noRot="1" noChangeAspect="1"/>
+          </p:cNvSpPr>
+          <p:nvPr>
+            <p:ph type="sldImg"/>
+          </p:nvPr>
+        </p:nvSpPr>
+        <p:spPr/>
+      </p:sp>
+      <p:sp>
+        <p:nvSpPr>
+          <p:cNvPr id="3" name="Notes Placeholder 2"/>
+          <p:cNvSpPr>
+            <a:spLocks noGrp="1"/>
+          </p:cNvSpPr>
+          <p:nvPr>
+            <p:ph type="body" idx="1"/>
+          </p:nvPr>
+        </p:nvSpPr>
+        <p:spPr/>
+        <p:txBody>
+          <a:bodyPr/>
+          <a:lstStyle/>
+          <a:p>
+            <a:r>
+              <a:rPr lang="en-AU" dirty="0"/>
               <a:t>“</a:t>
             </a:r>
             <a:r>
@@ -6301,7 +6420,7 @@
 </p:notes>
 </file>
 
-<file path=ppt/notesSlides/notesSlide21.xml><?xml version="1.0" encoding="utf-8"?>
+<file path=ppt/notesSlides/notesSlide22.xml><?xml version="1.0" encoding="utf-8"?>
 <p:notes xmlns:a="http://schemas.openxmlformats.org/drawingml/2006/main" xmlns:r="http://schemas.openxmlformats.org/officeDocument/2006/relationships" xmlns:p="http://schemas.openxmlformats.org/presentationml/2006/main">
   <p:cSld>
     <p:spTree>
@@ -7012,38 +7131,6 @@
           <a:bodyPr/>
           <a:lstStyle/>
           <a:p>
-            <a:r>
-              <a:rPr lang="en-AU" dirty="0"/>
-              <a:t>“Here’s the trap: with 39 PCs we can fit BMI almost perfectly on the training set. R² is essentially 1, RMSE is tiny, it looks fantastic.”</a:t>
-            </a:r>
-          </a:p>
-          <a:p>
-            <a:r>
-              <a:rPr lang="en-AU" dirty="0"/>
-              <a:t>“But on the test set, the illusion breaks. Predictions scatter, performance drops. This is a textbook case of </a:t>
-            </a:r>
-            <a:r>
-              <a:rPr lang="en-AU" b="1" dirty="0"/>
-              <a:t>overfitting, </a:t>
-            </a:r>
-            <a:r>
-              <a:rPr lang="en-AU" dirty="0"/>
-              <a:t>the model is capturing noise, not meaningful signal.”</a:t>
-            </a:r>
-          </a:p>
-          <a:p>
-            <a:r>
-              <a:rPr lang="en-AU" dirty="0"/>
-              <a:t>“Notice that we used almost as many predictors as samples. With so few degrees of freedom left, the coefficients can ‘explain’ the training data but have no stability.”</a:t>
-            </a:r>
-          </a:p>
-          <a:p>
-            <a:r>
-              <a:rPr lang="en-AU" dirty="0"/>
-              <a:t>“The big message: don’t be seduced by a beautiful train fit. Always check the test set. If the test plot looks this bad, it means the model hasn’t learned anything generalizable.”</a:t>
-            </a:r>
-          </a:p>
-          <a:p>
             <a:endParaRPr lang="en-US" dirty="0"/>
           </a:p>
         </p:txBody>
@@ -7065,7 +7152,7 @@
           <a:p>
             <a:fld id="{11C670DA-D77F-1249-B207-3EF3B8E0C85F}" type="slidenum">
               <a:rPr lang="en-US" smtClean="0"/>
-              <a:t>10</a:t>
+              <a:t>9</a:t>
             </a:fld>
             <a:endParaRPr lang="en-US"/>
           </a:p>
@@ -7074,7 +7161,7 @@
     </p:spTree>
     <p:extLst>
       <p:ext uri="{BB962C8B-B14F-4D97-AF65-F5344CB8AC3E}">
-        <p14:creationId xmlns:p14="http://schemas.microsoft.com/office/powerpoint/2010/main" val="2794533553"/>
+        <p14:creationId xmlns:p14="http://schemas.microsoft.com/office/powerpoint/2010/main" val="3797296739"/>
       </p:ext>
     </p:extLst>
   </p:cSld>
@@ -7130,33 +7217,33 @@
           <a:p>
             <a:r>
               <a:rPr lang="en-AU" dirty="0"/>
-              <a:t>“Why does the mirage happen? With so many PCs, the regression can fit almost every wiggle in the training data, including random noise.”</a:t>
+              <a:t>“Here’s the trap: with 39 PCs we can fit BMI almost perfectly on the training set. R² is essentially 1, RMSE is tiny, it looks fantastic.”</a:t>
             </a:r>
           </a:p>
           <a:p>
             <a:r>
               <a:rPr lang="en-AU" dirty="0"/>
-              <a:t>“That gives us very low training error, but the cost is high variance: the model becomes unstable, and predictions on new data jump around.”</a:t>
+              <a:t>“But on the test set, the illusion breaks. Predictions scatter, performance drops. This is a textbook case of </a:t>
+            </a:r>
+            <a:r>
+              <a:rPr lang="en-AU" b="1" dirty="0"/>
+              <a:t>overfitting, </a:t>
+            </a:r>
+            <a:r>
+              <a:rPr lang="en-AU" dirty="0"/>
+              <a:t>the model is capturing noise, not meaningful signal.”</a:t>
             </a:r>
           </a:p>
           <a:p>
             <a:r>
               <a:rPr lang="en-AU" dirty="0"/>
-              <a:t>“This is the bias–variance trade-off: too simple and you underfit, too complex and you overfit. Somewhere in the middle lies the sweet spot.”</a:t>
+              <a:t>“Notice that we used almost as many predictors as samples. With so few degrees of freedom left, the coefficients can ‘explain’ the training data but have no stability.”</a:t>
             </a:r>
           </a:p>
           <a:p>
             <a:r>
               <a:rPr lang="en-AU" dirty="0"/>
-              <a:t>“Our job is to </a:t>
-            </a:r>
-            <a:r>
-              <a:rPr lang="en-AU" b="1" dirty="0"/>
-              <a:t>find that sweet spot</a:t>
-            </a:r>
-            <a:r>
-              <a:rPr lang="en-AU" dirty="0"/>
-              <a:t>, and the only way is by evaluating on data the model hasn’t seen.”</a:t>
+              <a:t>“The big message: don’t be seduced by a beautiful train fit. Always check the test set. If the test plot looks this bad, it means the model hasn’t learned anything generalizable.”</a:t>
             </a:r>
           </a:p>
           <a:p>
@@ -7181,7 +7268,7 @@
           <a:p>
             <a:fld id="{11C670DA-D77F-1249-B207-3EF3B8E0C85F}" type="slidenum">
               <a:rPr lang="en-US" smtClean="0"/>
-              <a:t>11</a:t>
+              <a:t>10</a:t>
             </a:fld>
             <a:endParaRPr lang="en-US"/>
           </a:p>
@@ -7190,7 +7277,7 @@
     </p:spTree>
     <p:extLst>
       <p:ext uri="{BB962C8B-B14F-4D97-AF65-F5344CB8AC3E}">
-        <p14:creationId xmlns:p14="http://schemas.microsoft.com/office/powerpoint/2010/main" val="4147736162"/>
+        <p14:creationId xmlns:p14="http://schemas.microsoft.com/office/powerpoint/2010/main" val="2794533553"/>
       </p:ext>
     </p:extLst>
   </p:cSld>
@@ -7246,31 +7333,33 @@
           <a:p>
             <a:r>
               <a:rPr lang="en-AU" dirty="0"/>
-              <a:t>“So how do we fix the overfitting problem? The key is not to keep every PC, but to pick the number that balances bias and variance.”</a:t>
+              <a:t>“Why does the mirage happen? With so many PCs, the regression can fit almost every wiggle in the training data, including random noise.”</a:t>
             </a:r>
           </a:p>
           <a:p>
             <a:r>
               <a:rPr lang="en-AU" dirty="0"/>
-              <a:t>“We can try a range of PC counts, say 3 to 15, and evaluate on the test set or using cross-validation.”</a:t>
+              <a:t>“That gives us very low training error, but the cost is high variance: the model becomes unstable, and predictions on new data jump around.”</a:t>
             </a:r>
           </a:p>
           <a:p>
             <a:r>
               <a:rPr lang="en-AU" dirty="0"/>
-              <a:t>“This gives us a curve of Test RMSE versus number of PCs. Somewhere in the middle, the RMSE is lowest, that’s our sweet spot.”</a:t>
+              <a:t>“This is the bias–variance trade-off: too simple and you underfit, too complex and you overfit. Somewhere in the middle lies the sweet spot.”</a:t>
             </a:r>
           </a:p>
           <a:p>
             <a:r>
               <a:rPr lang="en-AU" dirty="0"/>
-              <a:t>“Notice that while training error always goes down as we add more PCs, test error tells the truth. That’s why evaluation is essential.”</a:t>
-            </a:r>
-          </a:p>
-          <a:p>
+              <a:t>“Our job is to </a:t>
+            </a:r>
+            <a:r>
+              <a:rPr lang="en-AU" b="1" dirty="0"/>
+              <a:t>find that sweet spot</a:t>
+            </a:r>
             <a:r>
               <a:rPr lang="en-AU" dirty="0"/>
-              <a:t>“The rule of thumb: keep models as simple as you can, as long as they still generalize.”</a:t>
+              <a:t>, and the only way is by evaluating on data the model hasn’t seen.”</a:t>
             </a:r>
           </a:p>
           <a:p>
@@ -7295,7 +7384,7 @@
           <a:p>
             <a:fld id="{11C670DA-D77F-1249-B207-3EF3B8E0C85F}" type="slidenum">
               <a:rPr lang="en-US" smtClean="0"/>
-              <a:t>12</a:t>
+              <a:t>11</a:t>
             </a:fld>
             <a:endParaRPr lang="en-US"/>
           </a:p>
@@ -7304,7 +7393,7 @@
     </p:spTree>
     <p:extLst>
       <p:ext uri="{BB962C8B-B14F-4D97-AF65-F5344CB8AC3E}">
-        <p14:creationId xmlns:p14="http://schemas.microsoft.com/office/powerpoint/2010/main" val="1823442889"/>
+        <p14:creationId xmlns:p14="http://schemas.microsoft.com/office/powerpoint/2010/main" val="4147736162"/>
       </p:ext>
     </p:extLst>
   </p:cSld>
@@ -7463,7 +7552,7 @@
           <a:p>
             <a:fld id="{3B33F01D-2D89-C44C-A6A3-8D882F85AC6D}" type="datetimeFigureOut">
               <a:rPr lang="en-US" smtClean="0"/>
-              <a:t>9/23/25</a:t>
+              <a:t>9/25/25</a:t>
             </a:fld>
             <a:endParaRPr lang="en-US"/>
           </a:p>
@@ -7663,7 +7752,7 @@
           <a:p>
             <a:fld id="{3B33F01D-2D89-C44C-A6A3-8D882F85AC6D}" type="datetimeFigureOut">
               <a:rPr lang="en-US" smtClean="0"/>
-              <a:t>9/23/25</a:t>
+              <a:t>9/25/25</a:t>
             </a:fld>
             <a:endParaRPr lang="en-US"/>
           </a:p>
@@ -7873,7 +7962,7 @@
           <a:p>
             <a:fld id="{3B33F01D-2D89-C44C-A6A3-8D882F85AC6D}" type="datetimeFigureOut">
               <a:rPr lang="en-US" smtClean="0"/>
-              <a:t>9/23/25</a:t>
+              <a:t>9/25/25</a:t>
             </a:fld>
             <a:endParaRPr lang="en-US"/>
           </a:p>
@@ -8073,7 +8162,7 @@
           <a:p>
             <a:fld id="{3B33F01D-2D89-C44C-A6A3-8D882F85AC6D}" type="datetimeFigureOut">
               <a:rPr lang="en-US" smtClean="0"/>
-              <a:t>9/23/25</a:t>
+              <a:t>9/25/25</a:t>
             </a:fld>
             <a:endParaRPr lang="en-US"/>
           </a:p>
@@ -8349,7 +8438,7 @@
           <a:p>
             <a:fld id="{3B33F01D-2D89-C44C-A6A3-8D882F85AC6D}" type="datetimeFigureOut">
               <a:rPr lang="en-US" smtClean="0"/>
-              <a:t>9/23/25</a:t>
+              <a:t>9/25/25</a:t>
             </a:fld>
             <a:endParaRPr lang="en-US"/>
           </a:p>
@@ -8617,7 +8706,7 @@
           <a:p>
             <a:fld id="{3B33F01D-2D89-C44C-A6A3-8D882F85AC6D}" type="datetimeFigureOut">
               <a:rPr lang="en-US" smtClean="0"/>
-              <a:t>9/23/25</a:t>
+              <a:t>9/25/25</a:t>
             </a:fld>
             <a:endParaRPr lang="en-US"/>
           </a:p>
@@ -9032,7 +9121,7 @@
           <a:p>
             <a:fld id="{3B33F01D-2D89-C44C-A6A3-8D882F85AC6D}" type="datetimeFigureOut">
               <a:rPr lang="en-US" smtClean="0"/>
-              <a:t>9/23/25</a:t>
+              <a:t>9/25/25</a:t>
             </a:fld>
             <a:endParaRPr lang="en-US"/>
           </a:p>
@@ -9174,7 +9263,7 @@
           <a:p>
             <a:fld id="{3B33F01D-2D89-C44C-A6A3-8D882F85AC6D}" type="datetimeFigureOut">
               <a:rPr lang="en-US" smtClean="0"/>
-              <a:t>9/23/25</a:t>
+              <a:t>9/25/25</a:t>
             </a:fld>
             <a:endParaRPr lang="en-US"/>
           </a:p>
@@ -9287,7 +9376,7 @@
           <a:p>
             <a:fld id="{3B33F01D-2D89-C44C-A6A3-8D882F85AC6D}" type="datetimeFigureOut">
               <a:rPr lang="en-US" smtClean="0"/>
-              <a:t>9/23/25</a:t>
+              <a:t>9/25/25</a:t>
             </a:fld>
             <a:endParaRPr lang="en-US"/>
           </a:p>
@@ -9600,7 +9689,7 @@
           <a:p>
             <a:fld id="{3B33F01D-2D89-C44C-A6A3-8D882F85AC6D}" type="datetimeFigureOut">
               <a:rPr lang="en-US" smtClean="0"/>
-              <a:t>9/23/25</a:t>
+              <a:t>9/25/25</a:t>
             </a:fld>
             <a:endParaRPr lang="en-US"/>
           </a:p>
@@ -9889,7 +9978,7 @@
           <a:p>
             <a:fld id="{3B33F01D-2D89-C44C-A6A3-8D882F85AC6D}" type="datetimeFigureOut">
               <a:rPr lang="en-US" smtClean="0"/>
-              <a:t>9/23/25</a:t>
+              <a:t>9/25/25</a:t>
             </a:fld>
             <a:endParaRPr lang="en-US"/>
           </a:p>
@@ -10132,7 +10221,7 @@
           <a:p>
             <a:fld id="{3B33F01D-2D89-C44C-A6A3-8D882F85AC6D}" type="datetimeFigureOut">
               <a:rPr lang="en-US" smtClean="0"/>
-              <a:t>9/23/25</a:t>
+              <a:t>9/25/25</a:t>
             </a:fld>
             <a:endParaRPr lang="en-US"/>
           </a:p>
@@ -12730,8 +12819,8 @@
             </a:fontRef>
           </p:style>
         </p:cxnSp>
-        <mc:AlternateContent xmlns:mc="http://schemas.openxmlformats.org/markup-compatibility/2006">
-          <mc:Choice xmlns:a14="http://schemas.microsoft.com/office/drawing/2010/main" Requires="a14">
+        <mc:AlternateContent xmlns:mc="http://schemas.openxmlformats.org/markup-compatibility/2006" xmlns:a14="http://schemas.microsoft.com/office/drawing/2010/main">
+          <mc:Choice Requires="a14">
             <p:sp>
               <p:nvSpPr>
                 <p:cNvPr id="12" name="TextBox 11">
@@ -12760,6 +12849,7 @@
                 </a:bodyPr>
                 <a:lstStyle/>
                 <a:p>
+                  <a:pPr/>
                   <a14:m>
                     <m:oMathPara xmlns:m="http://schemas.openxmlformats.org/officeDocument/2006/math">
                       <m:oMathParaPr>
@@ -12798,7 +12888,7 @@
               </p:txBody>
             </p:sp>
           </mc:Choice>
-          <mc:Fallback>
+          <mc:Fallback xmlns="">
             <p:sp>
               <p:nvSpPr>
                 <p:cNvPr id="12" name="TextBox 11">
@@ -12887,8 +12977,8 @@
           </p:style>
         </p:cxnSp>
       </p:grpSp>
-      <mc:AlternateContent xmlns:mc="http://schemas.openxmlformats.org/markup-compatibility/2006">
-        <mc:Choice xmlns:a14="http://schemas.microsoft.com/office/drawing/2010/main" Requires="a14">
+      <mc:AlternateContent xmlns:mc="http://schemas.openxmlformats.org/markup-compatibility/2006" xmlns:a14="http://schemas.microsoft.com/office/drawing/2010/main">
+        <mc:Choice Requires="a14">
           <p:sp>
             <p:nvSpPr>
               <p:cNvPr id="18" name="TextBox 17">
@@ -12917,6 +13007,7 @@
               </a:bodyPr>
               <a:lstStyle/>
               <a:p>
+                <a:pPr/>
                 <a14:m>
                   <m:oMathPara xmlns:m="http://schemas.openxmlformats.org/officeDocument/2006/math">
                     <m:oMathParaPr>
@@ -13014,7 +13105,7 @@
                           <m:nor/>
                         </m:rPr>
                         <a:rPr lang="en-US" sz="2400" dirty="0" smtClean="0"/>
-                        <m:t> * </m:t>
+                        <m:t> ∗ </m:t>
                       </m:r>
                       <m:r>
                         <m:rPr>
@@ -13048,7 +13139,7 @@
             </p:txBody>
           </p:sp>
         </mc:Choice>
-        <mc:Fallback>
+        <mc:Fallback xmlns="">
           <p:sp>
             <p:nvSpPr>
               <p:cNvPr id="18" name="TextBox 17">
@@ -13300,8 +13391,8 @@
           </a:p>
         </p:txBody>
       </p:sp>
-      <mc:AlternateContent xmlns:mc="http://schemas.openxmlformats.org/markup-compatibility/2006">
-        <mc:Choice xmlns:a14="http://schemas.microsoft.com/office/drawing/2010/main" Requires="a14">
+      <mc:AlternateContent xmlns:mc="http://schemas.openxmlformats.org/markup-compatibility/2006" xmlns:a14="http://schemas.microsoft.com/office/drawing/2010/main">
+        <mc:Choice Requires="a14">
           <p:sp>
             <p:nvSpPr>
               <p:cNvPr id="28" name="TextBox 27">
@@ -13330,6 +13421,7 @@
               </a:bodyPr>
               <a:lstStyle/>
               <a:p>
+                <a:pPr/>
                 <a14:m>
                   <m:oMathPara xmlns:m="http://schemas.openxmlformats.org/officeDocument/2006/math">
                     <m:oMathParaPr>
@@ -13396,7 +13488,7 @@
             </p:txBody>
           </p:sp>
         </mc:Choice>
-        <mc:Fallback>
+        <mc:Fallback xmlns="">
           <p:sp>
             <p:nvSpPr>
               <p:cNvPr id="28" name="TextBox 27">
@@ -26768,7 +26860,7 @@
           <p:nvPr>
             <p:extLst>
               <p:ext uri="{D42A27DB-BD31-4B8C-83A1-F6EECF244321}">
-                <p14:modId xmlns:p14="http://schemas.microsoft.com/office/powerpoint/2010/main" val="1705437719"/>
+                <p14:modId xmlns:p14="http://schemas.microsoft.com/office/powerpoint/2010/main" val="2116856847"/>
               </p:ext>
             </p:extLst>
           </p:nvPr>
@@ -26961,7 +27053,7 @@
                     <a:p>
                       <a:r>
                         <a:rPr lang="en-US" dirty="0"/>
-                        <a:t>FP</a:t>
+                        <a:t>FN</a:t>
                       </a:r>
                     </a:p>
                   </a:txBody>
@@ -27023,7 +27115,7 @@
                     <a:p>
                       <a:r>
                         <a:rPr lang="en-US" dirty="0"/>
-                        <a:t>FN</a:t>
+                        <a:t>FP</a:t>
                       </a:r>
                     </a:p>
                   </a:txBody>
@@ -28536,7 +28628,7 @@
           <p:nvPr>
             <p:extLst>
               <p:ext uri="{D42A27DB-BD31-4B8C-83A1-F6EECF244321}">
-                <p14:modId xmlns:p14="http://schemas.microsoft.com/office/powerpoint/2010/main" val="2857675326"/>
+                <p14:modId xmlns:p14="http://schemas.microsoft.com/office/powerpoint/2010/main" val="4105237541"/>
               </p:ext>
             </p:extLst>
           </p:nvPr>
@@ -28729,7 +28821,7 @@
                     <a:p>
                       <a:r>
                         <a:rPr lang="en-US" dirty="0"/>
-                        <a:t>FP</a:t>
+                        <a:t>FN</a:t>
                       </a:r>
                     </a:p>
                   </a:txBody>
@@ -28791,7 +28883,7 @@
                     <a:p>
                       <a:r>
                         <a:rPr lang="en-US" dirty="0"/>
-                        <a:t>FN</a:t>
+                        <a:t>FP</a:t>
                       </a:r>
                     </a:p>
                   </a:txBody>
@@ -29564,7 +29656,7 @@
 </file>
 
 <file path=ppt/slides/slide23.xml><?xml version="1.0" encoding="utf-8"?>
-<p:sld xmlns:a="http://schemas.openxmlformats.org/drawingml/2006/main" xmlns:r="http://schemas.openxmlformats.org/officeDocument/2006/relationships" xmlns:p="http://schemas.openxmlformats.org/presentationml/2006/main">
+<p:sld xmlns:a="http://schemas.openxmlformats.org/drawingml/2006/main" xmlns:r="http://schemas.openxmlformats.org/officeDocument/2006/relationships" xmlns:p="http://schemas.openxmlformats.org/presentationml/2006/main" show="0">
   <p:cSld>
     <p:spTree>
       <p:nvGrpSpPr>
@@ -41956,8 +42048,8 @@
             </a:fontRef>
           </p:style>
         </p:cxnSp>
-        <mc:AlternateContent xmlns:mc="http://schemas.openxmlformats.org/markup-compatibility/2006">
-          <mc:Choice xmlns:a14="http://schemas.microsoft.com/office/drawing/2010/main" Requires="a14">
+        <mc:AlternateContent xmlns:mc="http://schemas.openxmlformats.org/markup-compatibility/2006" xmlns:a14="http://schemas.microsoft.com/office/drawing/2010/main">
+          <mc:Choice Requires="a14">
             <p:sp>
               <p:nvSpPr>
                 <p:cNvPr id="21" name="TextBox 20">
@@ -41986,6 +42078,7 @@
                 </a:bodyPr>
                 <a:lstStyle/>
                 <a:p>
+                  <a:pPr/>
                   <a14:m>
                     <m:oMathPara xmlns:m="http://schemas.openxmlformats.org/officeDocument/2006/math">
                       <m:oMathParaPr>
@@ -42024,7 +42117,7 @@
               </p:txBody>
             </p:sp>
           </mc:Choice>
-          <mc:Fallback>
+          <mc:Fallback xmlns="">
             <p:sp>
               <p:nvSpPr>
                 <p:cNvPr id="21" name="TextBox 20">
@@ -43622,7 +43715,7 @@
           <p:nvPr/>
         </p:nvPicPr>
         <p:blipFill>
-          <a:blip r:embed="rId2"/>
+          <a:blip r:embed="rId3"/>
           <a:stretch>
             <a:fillRect/>
           </a:stretch>
@@ -43652,7 +43745,7 @@
           <p:nvPr/>
         </p:nvPicPr>
         <p:blipFill>
-          <a:blip r:embed="rId3">
+          <a:blip r:embed="rId4">
             <a:extLst>
               <a:ext uri="{28A0092B-C50C-407E-A947-70E740481C1C}">
                 <a14:useLocalDpi xmlns:a14="http://schemas.microsoft.com/office/drawing/2010/main" val="0"/>
